--- a/docs/content/pivoting/pivoting_activity.pptx
+++ b/docs/content/pivoting/pivoting_activity.pptx
@@ -7453,7 +7453,7 @@
             </a:pPr>
             <a:r>
               <a:rPr/>
-              <a:t>Part 11 · Going further</a:t>
+              <a:t>Extension — out of class (~30–40 min)</a:t>
             </a:r>
           </a:p>
         </p:txBody>
@@ -7473,12 +7473,68 @@
           <a:bodyPr/>
           <a:lstStyle/>
           <a:p>
+            <a:pPr lvl="0" indent="0" marL="0">
+              <a:buNone/>
+            </a:pPr>
+            <a:r>
+              <a:rPr i="1"/>
+              <a:t>Turn this in with your worksheet. You built the ice workflow on Lake Superior. Now run it end-to-end on a </a:t>
+            </a:r>
+            <a:r>
+              <a:rPr b="1" i="1"/>
+              <a:t>different Great Lake you pick</a:t>
+            </a:r>
+            <a:r>
+              <a:rPr i="1"/>
+              <a:t> and compare trends.</a:t>
+            </a:r>
+          </a:p>
+          <a:p>
             <a:pPr lvl="0" indent="0" marL="1270000">
               <a:buNone/>
             </a:pPr>
             <a:r>
+              <a:rPr sz="2000" b="1"/>
+              <a:t>Important</a:t>
+            </a:r>
+          </a:p>
+          <a:p>
+            <a:pPr lvl="0" indent="0" marL="1270000">
+              <a:buNone/>
+            </a:pPr>
+            <a:r>
+              <a:rPr sz="2000" b="1"/>
+              <a:t>E2 and E3 must be handwritten</a:t>
+            </a:r>
+            <a:r>
               <a:rPr sz="2000"/>
-              <a:t>Optional — do this if you finish early or want to push deeper.</a:t>
+              <a:t> on paper, photographed, and embedded (</a:t>
+            </a:r>
+            <a:r>
+              <a:rPr sz="2000">
+                <a:latin typeface="Courier"/>
+              </a:rPr>
+              <a:t>![caption](my_photo.jpg)</a:t>
+            </a:r>
+            <a:r>
+              <a:rPr sz="2000"/>
+              <a:t>). Typed answers get </a:t>
+            </a:r>
+            <a:r>
+              <a:rPr sz="2000" b="1"/>
+              <a:t>at most half credit, even if correct</a:t>
+            </a:r>
+            <a:r>
+              <a:rPr sz="2000"/>
+              <a:t> — I want your own prediction and reasoning about </a:t>
+            </a:r>
+            <a:r>
+              <a:rPr sz="2000" i="1"/>
+              <a:t>your own</a:t>
+            </a:r>
+            <a:r>
+              <a:rPr sz="2000"/>
+              <a:t> lake.</a:t>
             </a:r>
           </a:p>
           <a:p>
@@ -7490,7 +7546,7 @@
             </a:pPr>
             <a:r>
               <a:rPr b="1"/>
-              <a:t>Try a different Great Lake</a:t>
+              <a:t>E1 · Pivot a different lake (4 pts)</a:t>
             </a:r>
           </a:p>
           <a:p>
@@ -7499,7 +7555,118 @@
             </a:pPr>
             <a:r>
               <a:rPr/>
-              <a:t>The exact same code works for the other lakes — just swap the file name.</a:t>
+              <a:t>Pick one: </a:t>
+            </a:r>
+            <a:r>
+              <a:rPr>
+                <a:latin typeface="Courier"/>
+              </a:rPr>
+              <a:t>mic.txt</a:t>
+            </a:r>
+            <a:r>
+              <a:rPr/>
+              <a:t> (Michigan), </a:t>
+            </a:r>
+            <a:r>
+              <a:rPr>
+                <a:latin typeface="Courier"/>
+              </a:rPr>
+              <a:t>hur.txt</a:t>
+            </a:r>
+            <a:r>
+              <a:rPr/>
+              <a:t> (Huron), </a:t>
+            </a:r>
+            <a:r>
+              <a:rPr>
+                <a:latin typeface="Courier"/>
+              </a:rPr>
+              <a:t>eri.txt</a:t>
+            </a:r>
+            <a:r>
+              <a:rPr/>
+              <a:t> (Erie), </a:t>
+            </a:r>
+            <a:r>
+              <a:rPr>
+                <a:latin typeface="Courier"/>
+              </a:rPr>
+              <a:t>ont.txt</a:t>
+            </a:r>
+            <a:r>
+              <a:rPr/>
+              <a:t> (Ontario). Change only the file name in the URL and re-run the whole workflow:</a:t>
+            </a:r>
+          </a:p>
+          <a:p>
+            <a:pPr lvl="0" indent="0">
+              <a:buNone/>
+            </a:pPr>
+            <a:r>
+              <a:rPr>
+                <a:solidFill>
+                  <a:srgbClr val="003B4F"/>
+                </a:solidFill>
+                <a:latin typeface="Courier"/>
+              </a:rPr>
+              <a:t>url &lt;- </a:t>
+            </a:r>
+            <a:r>
+              <a:rPr>
+                <a:solidFill>
+                  <a:srgbClr val="20794D"/>
+                </a:solidFill>
+                <a:latin typeface="Courier"/>
+              </a:rPr>
+              <a:t>"https://www.glerl.noaa.gov/data/ice/glicd/daily/eri.txt"</a:t>
+            </a:r>
+            <a:r>
+              <a:rPr>
+                <a:solidFill>
+                  <a:srgbClr val="003B4F"/>
+                </a:solidFill>
+                <a:latin typeface="Courier"/>
+              </a:rPr>
+              <a:t>   </a:t>
+            </a:r>
+            <a:r>
+              <a:rPr>
+                <a:solidFill>
+                  <a:srgbClr val="5E5E5E"/>
+                </a:solidFill>
+                <a:latin typeface="Courier"/>
+              </a:rPr>
+              <a:t># &lt;- your lake</a:t>
+            </a:r>
+            <a:br/>
+            <a:r>
+              <a:rPr>
+                <a:solidFill>
+                  <a:srgbClr val="5E5E5E"/>
+                </a:solidFill>
+                <a:latin typeface="Courier"/>
+              </a:rPr>
+              <a:t># read + rownames_to_column -&gt; pivot_longer (names_prefix = "X")</a:t>
+            </a:r>
+            <a:br/>
+            <a:r>
+              <a:rPr>
+                <a:solidFill>
+                  <a:srgbClr val="5E5E5E"/>
+                </a:solidFill>
+                <a:latin typeface="Courier"/>
+              </a:rPr>
+              <a:t>#   -&gt; year to numeric, drop NA ice -&gt; slice_max() per year</a:t>
+            </a:r>
+            <a:br/>
+            <a:r>
+              <a:rPr>
+                <a:solidFill>
+                  <a:srgbClr val="5E5E5E"/>
+                </a:solidFill>
+                <a:latin typeface="Courier"/>
+              </a:rPr>
+              <a:t>#   -&gt; lm(ice_cover ~ year), report the slope (% per year)</a:t>
             </a:r>
           </a:p>
           <a:p>
@@ -7507,153 +7674,87 @@
               <a:buNone/>
             </a:pPr>
             <a:r>
+              <a:rPr/>
+              <a:t>Report your lake, its yearly-maximum ice </a:t>
+            </a:r>
+            <a:r>
               <a:rPr b="1"/>
-              <a:t>▶ Try this:</a:t>
-            </a:r>
-            <a:r>
-              <a:rPr/>
-              <a:t> change </a:t>
-            </a:r>
-            <a:r>
-              <a:rPr>
-                <a:latin typeface="Courier"/>
-              </a:rPr>
-              <a:t>sup.txt</a:t>
-            </a:r>
-            <a:r>
-              <a:rPr/>
-              <a:t> to </a:t>
-            </a:r>
-            <a:r>
-              <a:rPr>
-                <a:latin typeface="Courier"/>
-              </a:rPr>
-              <a:t>mic.txt</a:t>
-            </a:r>
-            <a:r>
-              <a:rPr/>
-              <a:t> (Michigan), </a:t>
-            </a:r>
-            <a:r>
-              <a:rPr>
-                <a:latin typeface="Courier"/>
-              </a:rPr>
-              <a:t>hur.txt</a:t>
-            </a:r>
-            <a:r>
-              <a:rPr/>
-              <a:t> (Huron), </a:t>
-            </a:r>
-            <a:r>
-              <a:rPr>
-                <a:latin typeface="Courier"/>
-              </a:rPr>
-              <a:t>eri.txt</a:t>
-            </a:r>
-            <a:r>
-              <a:rPr/>
-              <a:t> (Erie), or </a:t>
-            </a:r>
-            <a:r>
-              <a:rPr>
-                <a:latin typeface="Courier"/>
-              </a:rPr>
-              <a:t>ont.txt</a:t>
-            </a:r>
-            <a:r>
-              <a:rPr/>
-              <a:t> (Ontario).</a:t>
-            </a:r>
-          </a:p>
-          <a:p>
-            <a:pPr lvl="0" indent="0">
-              <a:buNone/>
-            </a:pPr>
-            <a:r>
-              <a:rPr>
-                <a:solidFill>
-                  <a:srgbClr val="5E5E5E"/>
-                </a:solidFill>
-                <a:latin typeface="Courier"/>
-              </a:rPr>
-              <a:t># Repeat the whole workflow for a different lake ---------</a:t>
-            </a:r>
-            <a:br/>
-            <a:r>
-              <a:rPr>
-                <a:solidFill>
-                  <a:srgbClr val="003B4F"/>
-                </a:solidFill>
-                <a:latin typeface="Courier"/>
-              </a:rPr>
-              <a:t>url &lt;- </a:t>
-            </a:r>
-            <a:r>
-              <a:rPr>
-                <a:solidFill>
-                  <a:srgbClr val="20794D"/>
-                </a:solidFill>
-                <a:latin typeface="Courier"/>
-              </a:rPr>
-              <a:t>"https://www.glerl.noaa.gov/data/ice/glicd/daily/eri.txt"</a:t>
-            </a:r>
-            <a:r>
-              <a:rPr>
-                <a:solidFill>
-                  <a:srgbClr val="003B4F"/>
-                </a:solidFill>
-                <a:latin typeface="Courier"/>
-              </a:rPr>
-              <a:t>   </a:t>
-            </a:r>
-            <a:r>
-              <a:rPr>
-                <a:solidFill>
-                  <a:srgbClr val="5E5E5E"/>
-                </a:solidFill>
-                <a:latin typeface="Courier"/>
-              </a:rPr>
-              <a:t># Lake Erie</a:t>
-            </a:r>
-            <a:br/>
-            <a:r>
-              <a:rPr>
-                <a:solidFill>
-                  <a:srgbClr val="5E5E5E"/>
-                </a:solidFill>
-                <a:latin typeface="Courier"/>
-              </a:rPr>
-              <a:t># ... then re-run Parts 1, 3, 4, 8, and 9 with this file</a:t>
+              <a:t>slope</a:t>
+            </a:r>
+            <a:r>
+              <a:rPr/>
+              <a:t>, and — Lake Superior’s is about </a:t>
+            </a:r>
+            <a:r>
+              <a:rPr b="1"/>
+              <a:t>−0.3 %/year</a:t>
+            </a:r>
+            <a:r>
+              <a:rPr/>
+              <a:t> — whether your lake is losing ice </a:t>
+            </a:r>
+            <a:r>
+              <a:rPr b="1"/>
+              <a:t>faster or slower</a:t>
+            </a:r>
+            <a:r>
+              <a:rPr/>
+              <a:t>.</a:t>
             </a:r>
           </a:p>
           <a:p>
             <a:pPr lvl="0" indent="0" marL="0">
-              <a:buNone/>
-            </a:pPr>
-            <a:r>
-              <a:rPr/>
-              <a:t>✏️ </a:t>
-            </a:r>
+              <a:spcBef>
+                <a:spcPts val="3000"/>
+              </a:spcBef>
+              <a:buNone/>
+            </a:pPr>
             <a:r>
               <a:rPr b="1"/>
-              <a:t>Your turn:</a:t>
-            </a:r>
-            <a:r>
-              <a:rPr/>
-              <a:t> Does your second lake show a stronger or weaker maximum-ice trend than Superior? Why might shallower lakes (like Erie) behave differently?</a:t>
-            </a:r>
-          </a:p>
-          <a:p>
-            <a:pPr lvl="0" indent="0">
-              <a:buNone/>
-            </a:pPr>
-            <a:r>
-              <a:rPr>
-                <a:latin typeface="Courier"/>
-              </a:rPr>
-              <a:t>Your lake:
-Its max-ice slope vs. Superior's:
-Your explanation:</a:t>
+              <a:t>E2 · Predict, then check — ✍️ by hand (3 pts)</a:t>
+            </a:r>
+          </a:p>
+          <a:p>
+            <a:pPr lvl="0" indent="0" marL="0">
+              <a:buNone/>
+            </a:pPr>
+            <a:r>
+              <a:rPr b="1"/>
+              <a:t>Before running E1:</a:t>
+            </a:r>
+            <a:r>
+              <a:rPr/>
+              <a:t> your lake is shallower or deeper than Superior. Predict, by hand, whether its max-ice trend will be steeper or shallower than Superior’s, and why. Then run E1 and write whether you were right.</a:t>
+            </a:r>
+          </a:p>
+          <a:p>
+            <a:pPr lvl="0" indent="0" marL="0">
+              <a:spcBef>
+                <a:spcPts val="3000"/>
+              </a:spcBef>
+              <a:buNone/>
+            </a:pPr>
+            <a:r>
+              <a:rPr b="1"/>
+              <a:t>E3 · Explain it — ✍️ by hand, with YOUR slope (3 pts)</a:t>
+            </a:r>
+          </a:p>
+          <a:p>
+            <a:pPr lvl="0" indent="-342900" marL="342900">
+              <a:buAutoNum type="arabicPeriod"/>
+            </a:pPr>
+            <a:r>
+              <a:rPr/>
+              <a:t>Using your actual slope, explain in plain language how fast your lake is losing (or gaining) maximum ice cover, and over the record how much total change that adds up to.</a:t>
+            </a:r>
+          </a:p>
+          <a:p>
+            <a:pPr lvl="0" indent="-342900" marL="342900">
+              <a:buAutoNum type="arabicPeriod"/>
+            </a:pPr>
+            <a:r>
+              <a:rPr/>
+              <a:t>Shallower lakes hold less heat. Explain, in your own words, how depth could make one lake’s ice respond faster to the same warming than another’s.</a:t>
             </a:r>
           </a:p>
         </p:txBody>
@@ -7993,7 +8094,7 @@
             </a:pPr>
             <a:r>
               <a:rPr i="1"/>
-              <a:t>End of Worksheet 15. Next: Worksheet 16 — factors.</a:t>
+              <a:t>End of the Lake Superior Ice worksheet.</a:t>
             </a:r>
           </a:p>
         </p:txBody>
